--- a/system-design-101/vi/lessons/sd-10-028/slides/sd-10-028.pptx
+++ b/system-design-101/vi/lessons/sd-10-028/slides/sd-10-028.pptx
@@ -14338,7 +14338,7 @@
               <a:t> thử,</a:t>
             </a:r>
             <a:r>
-              <a:rPr lang="en-US" sz="3300" b="1" dirty="0" spc="-4" kern="0">
+              <a:rPr lang="en-US" sz="3300" b="1" dirty="0" spc="35" kern="0">
                 <a:solidFill>
                   <a:srgbClr val="0F766E"/>
                 </a:solidFill>
@@ -14346,10 +14346,10 @@
                 <a:ea typeface="Be Vietnam Pro" pitchFamily="34" charset="-122"/>
                 <a:cs typeface="Be Vietnam Pro" pitchFamily="34" charset="-120"/>
               </a:rPr>
-              <a:t> đủ</a:t>
-            </a:r>
-            <a:r>
-              <a:rPr lang="en-US" sz="3300" b="1" dirty="0" spc="35" kern="0">
+              <a:t> trừu</a:t>
+            </a:r>
+            <a:r>
+              <a:rPr lang="en-US" sz="3300" b="1" dirty="0" spc="6" kern="0">
                 <a:solidFill>
                   <a:srgbClr val="0F766E"/>
                 </a:solidFill>
@@ -14357,10 +14357,10 @@
                 <a:ea typeface="Be Vietnam Pro" pitchFamily="34" charset="-122"/>
                 <a:cs typeface="Be Vietnam Pro" pitchFamily="34" charset="-120"/>
               </a:rPr>
-              <a:t> trừu</a:t>
-            </a:r>
-            <a:r>
-              <a:rPr lang="en-US" sz="3300" b="1" dirty="0" spc="6" kern="0">
+              <a:t> tượng</a:t>
+            </a:r>
+            <a:r>
+              <a:rPr lang="en-US" sz="3300" b="1" dirty="0" spc="14" kern="0">
                 <a:solidFill>
                   <a:srgbClr val="0F766E"/>
                 </a:solidFill>
@@ -14368,7 +14368,18 @@
                 <a:ea typeface="Be Vietnam Pro" pitchFamily="34" charset="-122"/>
                 <a:cs typeface="Be Vietnam Pro" pitchFamily="34" charset="-120"/>
               </a:rPr>
-              <a:t> tượng</a:t>
+              <a:t> vừa</a:t>
+            </a:r>
+            <a:r>
+              <a:rPr lang="en-US" sz="3300" b="1" dirty="0" spc="-6" kern="0">
+                <a:solidFill>
+                  <a:srgbClr val="0F766E"/>
+                </a:solidFill>
+                <a:latin typeface="Be Vietnam Pro" pitchFamily="34" charset="0"/>
+                <a:ea typeface="Be Vietnam Pro" pitchFamily="34" charset="-122"/>
+                <a:cs typeface="Be Vietnam Pro" pitchFamily="34" charset="-120"/>
+              </a:rPr>
+              <a:t> phải</a:t>
             </a:r>
             <a:endParaRPr lang="en-US" sz="3300" dirty="0"/>
           </a:p>
@@ -14413,15 +14424,37 @@
               <a:t>Hàm</a:t>
             </a:r>
             <a:r>
-              <a:rPr lang="en-US" sz="2550" dirty="0" spc="2" kern="0">
-                <a:solidFill>
-                  <a:srgbClr val="14161C"/>
-                </a:solidFill>
-                <a:latin typeface="Be Vietnam Pro" pitchFamily="34" charset="0"/>
-                <a:ea typeface="Be Vietnam Pro" pitchFamily="34" charset="-122"/>
-                <a:cs typeface="Be Vietnam Pro" pitchFamily="34" charset="-120"/>
-              </a:rPr>
-              <a:t> thuần</a:t>
+              <a:rPr lang="en-US" sz="2550" dirty="0" spc="-13" kern="0">
+                <a:solidFill>
+                  <a:srgbClr val="14161C"/>
+                </a:solidFill>
+                <a:latin typeface="Be Vietnam Pro" pitchFamily="34" charset="0"/>
+                <a:ea typeface="Be Vietnam Pro" pitchFamily="34" charset="-122"/>
+                <a:cs typeface="Be Vietnam Pro" pitchFamily="34" charset="-120"/>
+              </a:rPr>
+              <a:t> gọn</a:t>
+            </a:r>
+            <a:r>
+              <a:rPr lang="en-US" sz="2550" dirty="0" spc="0" kern="0">
+                <a:solidFill>
+                  <a:srgbClr val="14161C"/>
+                </a:solidFill>
+                <a:latin typeface="Be Vietnam Pro" pitchFamily="34" charset="0"/>
+                <a:ea typeface="Be Vietnam Pro" pitchFamily="34" charset="-122"/>
+                <a:cs typeface="Be Vietnam Pro" pitchFamily="34" charset="-120"/>
+              </a:rPr>
+              <a:t> có</a:t>
+            </a:r>
+            <a:r>
+              <a:rPr lang="en-US" sz="2550" dirty="0" spc="-4" kern="0">
+                <a:solidFill>
+                  <a:srgbClr val="14161C"/>
+                </a:solidFill>
+                <a:latin typeface="Be Vietnam Pro" pitchFamily="34" charset="0"/>
+                <a:ea typeface="Be Vietnam Pro" pitchFamily="34" charset="-122"/>
+                <a:cs typeface="Be Vietnam Pro" pitchFamily="34" charset="-120"/>
+              </a:rPr>
+              <a:t> ba</a:t>
             </a:r>
             <a:r>
               <a:rPr lang="en-US" sz="2550" dirty="0" spc="-1" kern="0">
@@ -14432,18 +14465,7 @@
                 <a:ea typeface="Be Vietnam Pro" pitchFamily="34" charset="-122"/>
                 <a:cs typeface="Be Vietnam Pro" pitchFamily="34" charset="-120"/>
               </a:rPr>
-              <a:t> có</a:t>
-            </a:r>
-            <a:r>
-              <a:rPr lang="en-US" sz="2550" dirty="0" spc="-5" kern="0">
-                <a:solidFill>
-                  <a:srgbClr val="14161C"/>
-                </a:solidFill>
-                <a:latin typeface="Be Vietnam Pro" pitchFamily="34" charset="0"/>
-                <a:ea typeface="Be Vietnam Pro" pitchFamily="34" charset="-122"/>
-                <a:cs typeface="Be Vietnam Pro" pitchFamily="34" charset="-120"/>
-              </a:rPr>
-              <a:t> ba</a:t>
+              <a:t> ca</a:t>
             </a:r>
             <a:r>
               <a:rPr lang="en-US" sz="2550" dirty="0" spc="0" kern="0">
@@ -14454,7 +14476,29 @@
                 <a:ea typeface="Be Vietnam Pro" pitchFamily="34" charset="-122"/>
                 <a:cs typeface="Be Vietnam Pro" pitchFamily="34" charset="-120"/>
               </a:rPr>
-              <a:t> ca</a:t>
+              <a:t> minh</a:t>
+            </a:r>
+            <a:r>
+              <a:rPr lang="en-US" sz="2550" dirty="0" spc="-4" kern="0">
+                <a:solidFill>
+                  <a:srgbClr val="14161C"/>
+                </a:solidFill>
+                <a:latin typeface="Be Vietnam Pro" pitchFamily="34" charset="0"/>
+                <a:ea typeface="Be Vietnam Pro" pitchFamily="34" charset="-122"/>
+                <a:cs typeface="Be Vietnam Pro" pitchFamily="34" charset="-120"/>
+              </a:rPr>
+              <a:t> họa;</a:t>
+            </a:r>
+            <a:r>
+              <a:rPr lang="en-US" sz="2550" dirty="0" spc="-2" kern="0">
+                <a:solidFill>
+                  <a:srgbClr val="14161C"/>
+                </a:solidFill>
+                <a:latin typeface="Be Vietnam Pro" pitchFamily="34" charset="0"/>
+                <a:ea typeface="Be Vietnam Pro" pitchFamily="34" charset="-122"/>
+                <a:cs typeface="Be Vietnam Pro" pitchFamily="34" charset="-120"/>
+              </a:rPr>
+              <a:t> bảng</a:t>
             </a:r>
             <a:r>
               <a:rPr lang="en-US" sz="2550" dirty="0" spc="1" kern="0">
@@ -14465,29 +14509,18 @@
                 <a:ea typeface="Be Vietnam Pro" pitchFamily="34" charset="-122"/>
                 <a:cs typeface="Be Vietnam Pro" pitchFamily="34" charset="-120"/>
               </a:rPr>
-              <a:t> kiểm</a:t>
-            </a:r>
-            <a:r>
-              <a:rPr lang="en-US" sz="2550" dirty="0" spc="-1" kern="0">
-                <a:solidFill>
-                  <a:srgbClr val="14161C"/>
-                </a:solidFill>
-                <a:latin typeface="Be Vietnam Pro" pitchFamily="34" charset="0"/>
-                <a:ea typeface="Be Vietnam Pro" pitchFamily="34" charset="-122"/>
-                <a:cs typeface="Be Vietnam Pro" pitchFamily="34" charset="-120"/>
-              </a:rPr>
-              <a:t> thử;</a:t>
-            </a:r>
-            <a:r>
-              <a:rPr lang="en-US" sz="2550" dirty="0" spc="-2" kern="0">
-                <a:solidFill>
-                  <a:srgbClr val="14161C"/>
-                </a:solidFill>
-                <a:latin typeface="Be Vietnam Pro" pitchFamily="34" charset="0"/>
-                <a:ea typeface="Be Vietnam Pro" pitchFamily="34" charset="-122"/>
-                <a:cs typeface="Be Vietnam Pro" pitchFamily="34" charset="-120"/>
-              </a:rPr>
-              <a:t> bảng</a:t>
+              <a:t> giảm</a:t>
+            </a:r>
+            <a:r>
+              <a:rPr lang="en-US" sz="2550" dirty="0" spc="0" kern="0">
+                <a:solidFill>
+                  <a:srgbClr val="14161C"/>
+                </a:solidFill>
+                <a:latin typeface="Be Vietnam Pro" pitchFamily="34" charset="0"/>
+                <a:ea typeface="Be Vietnam Pro" pitchFamily="34" charset="-122"/>
+                <a:cs typeface="Be Vietnam Pro" pitchFamily="34" charset="-120"/>
+              </a:rPr>
+              <a:t> giá</a:t>
             </a:r>
             <a:r>
               <a:rPr lang="en-US" sz="2550" dirty="0" spc="1" kern="0">
@@ -14498,43 +14531,21 @@
                 <a:ea typeface="Be Vietnam Pro" pitchFamily="34" charset="-122"/>
                 <a:cs typeface="Be Vietnam Pro" pitchFamily="34" charset="-120"/>
               </a:rPr>
-              <a:t> giảm</a:t>
-            </a:r>
-            <a:r>
-              <a:rPr lang="en-US" sz="2550" dirty="0" spc="0" kern="0">
-                <a:solidFill>
-                  <a:srgbClr val="14161C"/>
-                </a:solidFill>
-                <a:latin typeface="Be Vietnam Pro" pitchFamily="34" charset="0"/>
-                <a:ea typeface="Be Vietnam Pro" pitchFamily="34" charset="-122"/>
-                <a:cs typeface="Be Vietnam Pro" pitchFamily="34" charset="-120"/>
-              </a:rPr>
-              <a:t> giá</a:t>
+              <a:t> nằm</a:t>
+            </a:r>
+            <a:r>
+              <a:rPr lang="en-US" sz="2550" dirty="0" spc="-6" kern="0">
+                <a:solidFill>
+                  <a:srgbClr val="14161C"/>
+                </a:solidFill>
+                <a:latin typeface="Be Vietnam Pro" pitchFamily="34" charset="0"/>
+                <a:ea typeface="Be Vietnam Pro" pitchFamily="34" charset="-122"/>
+                <a:cs typeface="Be Vietnam Pro" pitchFamily="34" charset="-120"/>
+              </a:rPr>
+              <a:t> sau</a:t>
             </a:r>
             <a:r>
               <a:rPr lang="en-US" sz="2550" dirty="0" spc="1" kern="0">
-                <a:solidFill>
-                  <a:srgbClr val="14161C"/>
-                </a:solidFill>
-                <a:latin typeface="Be Vietnam Pro" pitchFamily="34" charset="0"/>
-                <a:ea typeface="Be Vietnam Pro" pitchFamily="34" charset="-122"/>
-                <a:cs typeface="Be Vietnam Pro" pitchFamily="34" charset="-120"/>
-              </a:rPr>
-              <a:t> nằm</a:t>
-            </a:r>
-            <a:r>
-              <a:rPr lang="en-US" sz="2550" dirty="0" spc="-7" kern="0">
-                <a:solidFill>
-                  <a:srgbClr val="14161C"/>
-                </a:solidFill>
-                <a:latin typeface="Be Vietnam Pro" pitchFamily="34" charset="0"/>
-                <a:ea typeface="Be Vietnam Pro" pitchFamily="34" charset="-122"/>
-                <a:cs typeface="Be Vietnam Pro" pitchFamily="34" charset="-120"/>
-              </a:rPr>
-              <a:t> sau</a:t>
-            </a:r>
-            <a:r>
-              <a:rPr lang="en-US" sz="2550" dirty="0" spc="2" kern="0">
                 <a:solidFill>
                   <a:srgbClr val="14161C"/>
                 </a:solidFill>
@@ -14854,6 +14865,116 @@
               <a:t> chỉ</a:t>
             </a:r>
             <a:r>
+              <a:rPr lang="en-US" sz="2550" dirty="0" spc="9" kern="0">
+                <a:solidFill>
+                  <a:srgbClr val="14161C"/>
+                </a:solidFill>
+                <a:latin typeface="Be Vietnam Pro" pitchFamily="34" charset="0"/>
+                <a:ea typeface="Be Vietnam Pro" pitchFamily="34" charset="-122"/>
+                <a:cs typeface="Be Vietnam Pro" pitchFamily="34" charset="-120"/>
+              </a:rPr>
+              <a:t> đọc</a:t>
+            </a:r>
+            <a:r>
+              <a:rPr lang="en-US" sz="2550" dirty="0" spc="-5" kern="0">
+                <a:solidFill>
+                  <a:srgbClr val="14161C"/>
+                </a:solidFill>
+                <a:latin typeface="Be Vietnam Pro" pitchFamily="34" charset="0"/>
+                <a:ea typeface="Be Vietnam Pro" pitchFamily="34" charset="-122"/>
+                <a:cs typeface="Be Vietnam Pro" pitchFamily="34" charset="-120"/>
+              </a:rPr>
+              <a:t> một</a:t>
+            </a:r>
+            <a:r>
+              <a:rPr lang="en-US" sz="2550" dirty="0" spc="-2" kern="0">
+                <a:solidFill>
+                  <a:srgbClr val="14161C"/>
+                </a:solidFill>
+                <a:latin typeface="Be Vietnam Pro" pitchFamily="34" charset="0"/>
+                <a:ea typeface="Be Vietnam Pro" pitchFamily="34" charset="-122"/>
+                <a:cs typeface="Be Vietnam Pro" pitchFamily="34" charset="-120"/>
+              </a:rPr>
+              <a:t> bảng</a:t>
+            </a:r>
+            <a:r>
+              <a:rPr lang="en-US" sz="2550" dirty="0" spc="0" kern="0">
+                <a:solidFill>
+                  <a:srgbClr val="14161C"/>
+                </a:solidFill>
+                <a:latin typeface="Be Vietnam Pro" pitchFamily="34" charset="0"/>
+                <a:ea typeface="Be Vietnam Pro" pitchFamily="34" charset="-122"/>
+                <a:cs typeface="Be Vietnam Pro" pitchFamily="34" charset="-120"/>
+              </a:rPr>
+              <a:t> hằng, nên dễ</a:t>
+            </a:r>
+            <a:r>
+              <a:rPr lang="en-US" sz="2550" dirty="0" spc="1" kern="0">
+                <a:solidFill>
+                  <a:srgbClr val="14161C"/>
+                </a:solidFill>
+                <a:latin typeface="Be Vietnam Pro" pitchFamily="34" charset="0"/>
+                <a:ea typeface="Be Vietnam Pro" pitchFamily="34" charset="-122"/>
+                <a:cs typeface="Be Vietnam Pro" pitchFamily="34" charset="-120"/>
+              </a:rPr>
+              <a:t> kiểm</a:t>
+            </a:r>
+            <a:r>
+              <a:rPr lang="en-US" sz="2550" dirty="0" spc="0" kern="0">
+                <a:solidFill>
+                  <a:srgbClr val="14161C"/>
+                </a:solidFill>
+                <a:latin typeface="Be Vietnam Pro" pitchFamily="34" charset="0"/>
+                <a:ea typeface="Be Vietnam Pro" pitchFamily="34" charset="-122"/>
+                <a:cs typeface="Be Vietnam Pro" pitchFamily="34" charset="-120"/>
+              </a:rPr>
+              <a:t> thử.</a:t>
+            </a:r>
+            <a:r>
+              <a:rPr lang="en-US" sz="2550" dirty="0" spc="2" kern="0">
+                <a:solidFill>
+                  <a:srgbClr val="14161C"/>
+                </a:solidFill>
+                <a:latin typeface="Be Vietnam Pro" pitchFamily="34" charset="0"/>
+                <a:ea typeface="Be Vietnam Pro" pitchFamily="34" charset="-122"/>
+                <a:cs typeface="Be Vietnam Pro" pitchFamily="34" charset="-120"/>
+              </a:rPr>
+              <a:t> Ba</a:t>
+            </a:r>
+            <a:r>
+              <a:rPr lang="en-US" sz="2550" dirty="0" spc="0" kern="0">
+                <a:solidFill>
+                  <a:srgbClr val="14161C"/>
+                </a:solidFill>
+                <a:latin typeface="Be Vietnam Pro" pitchFamily="34" charset="0"/>
+                <a:ea typeface="Be Vietnam Pro" pitchFamily="34" charset="-122"/>
+                <a:cs typeface="Be Vietnam Pro" pitchFamily="34" charset="-120"/>
+              </a:rPr>
+              <a:t> ca</a:t>
+            </a:r>
+            <a:r>
+              <a:rPr lang="en-US" sz="2550" dirty="0" spc="1" kern="0">
+                <a:solidFill>
+                  <a:srgbClr val="14161C"/>
+                </a:solidFill>
+                <a:latin typeface="Be Vietnam Pro" pitchFamily="34" charset="0"/>
+                <a:ea typeface="Be Vietnam Pro" pitchFamily="34" charset="-122"/>
+                <a:cs typeface="Be Vietnam Pro" pitchFamily="34" charset="-120"/>
+              </a:rPr>
+              <a:t> chỉ</a:t>
+            </a:r>
+            <a:r>
+              <a:rPr lang="en-US" sz="2550" dirty="0" spc="0" kern="0">
+                <a:solidFill>
+                  <a:srgbClr val="14161C"/>
+                </a:solidFill>
+                <a:latin typeface="Be Vietnam Pro" pitchFamily="34" charset="0"/>
+                <a:ea typeface="Be Vietnam Pro" pitchFamily="34" charset="-122"/>
+                <a:cs typeface="Be Vietnam Pro" pitchFamily="34" charset="-120"/>
+              </a:rPr>
+              <a:t> là</a:t>
+            </a:r>
+            <a:r>
               <a:rPr lang="en-US" sz="2550" dirty="0" spc="-1" kern="0">
                 <a:solidFill>
                   <a:srgbClr val="14161C"/>
@@ -14862,73 +14983,7 @@
                 <a:ea typeface="Be Vietnam Pro" pitchFamily="34" charset="-122"/>
                 <a:cs typeface="Be Vietnam Pro" pitchFamily="34" charset="-120"/>
               </a:rPr>
-              <a:t> nhận</a:t>
-            </a:r>
-            <a:r>
-              <a:rPr lang="en-US" sz="2550" dirty="0" spc="15" kern="0">
-                <a:solidFill>
-                  <a:srgbClr val="14161C"/>
-                </a:solidFill>
-                <a:latin typeface="Be Vietnam Pro" pitchFamily="34" charset="0"/>
-                <a:ea typeface="Be Vietnam Pro" pitchFamily="34" charset="-122"/>
-                <a:cs typeface="Be Vietnam Pro" pitchFamily="34" charset="-120"/>
-              </a:rPr>
-              <a:t> đầu</a:t>
-            </a:r>
-            <a:r>
-              <a:rPr lang="en-US" sz="2550" dirty="0" spc="-14" kern="0">
-                <a:solidFill>
-                  <a:srgbClr val="14161C"/>
-                </a:solidFill>
-                <a:latin typeface="Be Vietnam Pro" pitchFamily="34" charset="0"/>
-                <a:ea typeface="Be Vietnam Pro" pitchFamily="34" charset="-122"/>
-                <a:cs typeface="Be Vietnam Pro" pitchFamily="34" charset="-120"/>
-              </a:rPr>
-              <a:t> vào</a:t>
-            </a:r>
-            <a:r>
-              <a:rPr lang="en-US" sz="2550" dirty="0" spc="-18" kern="0">
-                <a:solidFill>
-                  <a:srgbClr val="14161C"/>
-                </a:solidFill>
-                <a:latin typeface="Be Vietnam Pro" pitchFamily="34" charset="0"/>
-                <a:ea typeface="Be Vietnam Pro" pitchFamily="34" charset="-122"/>
-                <a:cs typeface="Be Vietnam Pro" pitchFamily="34" charset="-120"/>
-              </a:rPr>
-              <a:t> và</a:t>
-            </a:r>
-            <a:r>
-              <a:rPr lang="en-US" sz="2550" dirty="0" spc="-24" kern="0">
-                <a:solidFill>
-                  <a:srgbClr val="14161C"/>
-                </a:solidFill>
-                <a:latin typeface="Be Vietnam Pro" pitchFamily="34" charset="0"/>
-                <a:ea typeface="Be Vietnam Pro" pitchFamily="34" charset="-122"/>
-                <a:cs typeface="Be Vietnam Pro" pitchFamily="34" charset="-120"/>
-              </a:rPr>
-              <a:t> trả</a:t>
-            </a:r>
-            <a:r>
-              <a:rPr lang="en-US" sz="2550" dirty="0" spc="14" kern="0">
-                <a:solidFill>
-                  <a:srgbClr val="14161C"/>
-                </a:solidFill>
-                <a:latin typeface="Be Vietnam Pro" pitchFamily="34" charset="0"/>
-                <a:ea typeface="Be Vietnam Pro" pitchFamily="34" charset="-122"/>
-                <a:cs typeface="Be Vietnam Pro" pitchFamily="34" charset="-120"/>
-              </a:rPr>
-              <a:t> đầu</a:t>
-            </a:r>
-            <a:r>
-              <a:rPr lang="en-US" sz="2550" dirty="0" spc="-26" kern="0">
-                <a:solidFill>
-                  <a:srgbClr val="14161C"/>
-                </a:solidFill>
-                <a:latin typeface="Be Vietnam Pro" pitchFamily="34" charset="0"/>
-                <a:ea typeface="Be Vietnam Pro" pitchFamily="34" charset="-122"/>
-                <a:cs typeface="Be Vietnam Pro" pitchFamily="34" charset="-120"/>
-              </a:rPr>
-              <a:t> ra,</a:t>
+              <a:t> ví</a:t>
             </a:r>
             <a:r>
               <a:rPr lang="en-US" sz="2550" dirty="0" spc="0" kern="0">
@@ -14939,73 +14994,7 @@
                 <a:ea typeface="Be Vietnam Pro" pitchFamily="34" charset="-122"/>
                 <a:cs typeface="Be Vietnam Pro" pitchFamily="34" charset="-120"/>
               </a:rPr>
-              <a:t> nên</a:t>
-            </a:r>
-            <a:r>
-              <a:rPr lang="en-US" sz="2550" dirty="0" spc="-5" kern="0">
-                <a:solidFill>
-                  <a:srgbClr val="14161C"/>
-                </a:solidFill>
-                <a:latin typeface="Be Vietnam Pro" pitchFamily="34" charset="0"/>
-                <a:ea typeface="Be Vietnam Pro" pitchFamily="34" charset="-122"/>
-                <a:cs typeface="Be Vietnam Pro" pitchFamily="34" charset="-120"/>
-              </a:rPr>
-              <a:t> ba</a:t>
-            </a:r>
-            <a:r>
-              <a:rPr lang="en-US" sz="2550" dirty="0" spc="0" kern="0">
-                <a:solidFill>
-                  <a:srgbClr val="14161C"/>
-                </a:solidFill>
-                <a:latin typeface="Be Vietnam Pro" pitchFamily="34" charset="0"/>
-                <a:ea typeface="Be Vietnam Pro" pitchFamily="34" charset="-122"/>
-                <a:cs typeface="Be Vietnam Pro" pitchFamily="34" charset="-120"/>
-              </a:rPr>
-              <a:t> ca</a:t>
-            </a:r>
-            <a:r>
-              <a:rPr lang="en-US" sz="2550" dirty="0" spc="1" kern="0">
-                <a:solidFill>
-                  <a:srgbClr val="14161C"/>
-                </a:solidFill>
-                <a:latin typeface="Be Vietnam Pro" pitchFamily="34" charset="0"/>
-                <a:ea typeface="Be Vietnam Pro" pitchFamily="34" charset="-122"/>
-                <a:cs typeface="Be Vietnam Pro" pitchFamily="34" charset="-120"/>
-              </a:rPr>
-              <a:t> kiểm</a:t>
-            </a:r>
-            <a:r>
-              <a:rPr lang="en-US" sz="2550" dirty="0" spc="-1" kern="0">
-                <a:solidFill>
-                  <a:srgbClr val="14161C"/>
-                </a:solidFill>
-                <a:latin typeface="Be Vietnam Pro" pitchFamily="34" charset="0"/>
-                <a:ea typeface="Be Vietnam Pro" pitchFamily="34" charset="-122"/>
-                <a:cs typeface="Be Vietnam Pro" pitchFamily="34" charset="-120"/>
-              </a:rPr>
-              <a:t> thử</a:t>
-            </a:r>
-            <a:r>
-              <a:rPr lang="en-US" sz="2550" dirty="0" spc="1" kern="0">
-                <a:solidFill>
-                  <a:srgbClr val="14161C"/>
-                </a:solidFill>
-                <a:latin typeface="Be Vietnam Pro" pitchFamily="34" charset="0"/>
-                <a:ea typeface="Be Vietnam Pro" pitchFamily="34" charset="-122"/>
-                <a:cs typeface="Be Vietnam Pro" pitchFamily="34" charset="-120"/>
-              </a:rPr>
-              <a:t> là</a:t>
-            </a:r>
-            <a:r>
-              <a:rPr lang="en-US" sz="2550" dirty="0" spc="-1" kern="0">
-                <a:solidFill>
-                  <a:srgbClr val="14161C"/>
-                </a:solidFill>
-                <a:latin typeface="Be Vietnam Pro" pitchFamily="34" charset="0"/>
-                <a:ea typeface="Be Vietnam Pro" pitchFamily="34" charset="-122"/>
-                <a:cs typeface="Be Vietnam Pro" pitchFamily="34" charset="-120"/>
-              </a:rPr>
-              <a:t> đủ.</a:t>
+              <a:t> dụ.</a:t>
             </a:r>
             <a:endParaRPr lang="en-US" sz="2550" dirty="0"/>
           </a:p>

--- a/system-design-101/vi/lessons/sd-10-028/slides/sd-10-028.pptx
+++ b/system-design-101/vi/lessons/sd-10-028/slides/sd-10-028.pptx
@@ -4083,7 +4083,7 @@
         <p:spPr>
           <a:xfrm>
             <a:off x="1257300" y="7315200"/>
-            <a:ext cx="6953250" cy="323850"/>
+            <a:ext cx="6953250" cy="628650"/>
           </a:xfrm>
           <a:prstGeom prst="rect">
             <a:avLst/>
@@ -4092,10 +4092,13 @@
           <a:ln/>
         </p:spPr>
         <p:txBody>
-          <a:bodyPr wrap="square" lIns="0" tIns="0" rIns="0" bIns="0" rtlCol="0" anchor="t"/>
+          <a:bodyPr wrap="square" lIns="0" tIns="9716" rIns="0" bIns="-9716" rtlCol="0" anchor="t"/>
           <a:lstStyle/>
           <a:p>
             <a:pPr algn="l" indent="0" marL="0">
+              <a:lnSpc>
+                <a:spcPts val="2340"/>
+              </a:lnSpc>
               <a:buNone/>
             </a:pPr>
             <a:r>
@@ -4107,7 +4110,18 @@
                 <a:ea typeface="Be Vietnam Pro" pitchFamily="34" charset="-122"/>
                 <a:cs typeface="Be Vietnam Pro" pitchFamily="34" charset="-120"/>
               </a:rPr>
-              <a:t>Single,</a:t>
+              <a:t>Single</a:t>
+            </a:r>
+            <a:r>
+              <a:rPr lang="en-US" sz="1800" dirty="0" spc="-6" kern="0">
+                <a:solidFill>
+                  <a:srgbClr val="C4C8D6"/>
+                </a:solidFill>
+                <a:latin typeface="Be Vietnam Pro" pitchFamily="34" charset="0"/>
+                <a:ea typeface="Be Vietnam Pro" pitchFamily="34" charset="-122"/>
+                <a:cs typeface="Be Vietnam Pro" pitchFamily="34" charset="-120"/>
+              </a:rPr>
+              <a:t> responsibility,</a:t>
             </a:r>
             <a:r>
               <a:rPr lang="en-US" sz="1800" dirty="0" spc="-3" kern="0">
@@ -4118,10 +4132,10 @@
                 <a:ea typeface="Be Vietnam Pro" pitchFamily="34" charset="-122"/>
                 <a:cs typeface="Be Vietnam Pro" pitchFamily="34" charset="-120"/>
               </a:rPr>
-              <a:t> Open,</a:t>
-            </a:r>
-            <a:r>
-              <a:rPr lang="en-US" sz="1800" dirty="0" spc="-15" kern="0">
+              <a:t> Open-closed,</a:t>
+            </a:r>
+            <a:r>
+              <a:rPr lang="en-US" sz="1800" dirty="0" spc="-17" kern="0">
                 <a:solidFill>
                   <a:srgbClr val="C4C8D6"/>
                 </a:solidFill>
@@ -4129,10 +4143,10 @@
                 <a:ea typeface="Be Vietnam Pro" pitchFamily="34" charset="-122"/>
                 <a:cs typeface="Be Vietnam Pro" pitchFamily="34" charset="-120"/>
               </a:rPr>
-              <a:t> Liskov,</a:t>
-            </a:r>
-            <a:r>
-              <a:rPr lang="en-US" sz="1800" dirty="0" spc="-9" kern="0">
+              <a:t> Liskov</a:t>
+            </a:r>
+            <a:r>
+              <a:rPr lang="en-US" sz="1800" dirty="0" spc="-3" kern="0">
                 <a:solidFill>
                   <a:srgbClr val="C4C8D6"/>
                 </a:solidFill>
@@ -4140,7 +4154,38 @@
                 <a:ea typeface="Be Vietnam Pro" pitchFamily="34" charset="-122"/>
                 <a:cs typeface="Be Vietnam Pro" pitchFamily="34" charset="-120"/>
               </a:rPr>
-              <a:t> Interface,</a:t>
+              <a:t> substitution,</a:t>
+            </a:r>
+            <a:endParaRPr lang="en-US" sz="1800" dirty="0"/>
+          </a:p>
+          <a:p>
+            <a:pPr algn="l" indent="0" marL="0">
+              <a:lnSpc>
+                <a:spcPts val="2340"/>
+              </a:lnSpc>
+              <a:buNone/>
+            </a:pPr>
+            <a:r>
+              <a:rPr lang="en-US" sz="1800" dirty="0" spc="-11" kern="0">
+                <a:solidFill>
+                  <a:srgbClr val="C4C8D6"/>
+                </a:solidFill>
+                <a:latin typeface="Be Vietnam Pro" pitchFamily="34" charset="0"/>
+                <a:ea typeface="Be Vietnam Pro" pitchFamily="34" charset="-122"/>
+                <a:cs typeface="Be Vietnam Pro" pitchFamily="34" charset="-120"/>
+              </a:rPr>
+              <a:t>Interface</a:t>
+            </a:r>
+            <a:r>
+              <a:rPr lang="en-US" sz="1800" dirty="0" spc="-14" kern="0">
+                <a:solidFill>
+                  <a:srgbClr val="C4C8D6"/>
+                </a:solidFill>
+                <a:latin typeface="Be Vietnam Pro" pitchFamily="34" charset="0"/>
+                <a:ea typeface="Be Vietnam Pro" pitchFamily="34" charset="-122"/>
+                <a:cs typeface="Be Vietnam Pro" pitchFamily="34" charset="-120"/>
+              </a:rPr>
+              <a:t> segregation,</a:t>
             </a:r>
             <a:r>
               <a:rPr lang="en-US" sz="1800" dirty="0" spc="-6" kern="0">
@@ -4153,6 +4198,17 @@
               </a:rPr>
               <a:t> Dependency</a:t>
             </a:r>
+            <a:r>
+              <a:rPr lang="en-US" sz="1800" dirty="0" spc="-7" kern="0">
+                <a:solidFill>
+                  <a:srgbClr val="C4C8D6"/>
+                </a:solidFill>
+                <a:latin typeface="Be Vietnam Pro" pitchFamily="34" charset="0"/>
+                <a:ea typeface="Be Vietnam Pro" pitchFamily="34" charset="-122"/>
+                <a:cs typeface="Be Vietnam Pro" pitchFamily="34" charset="-120"/>
+              </a:rPr>
+              <a:t> inversion</a:t>
+            </a:r>
             <a:endParaRPr lang="en-US" sz="1800" dirty="0"/>
           </a:p>
         </p:txBody>
@@ -4165,8 +4221,8 @@
         </p:nvSpPr>
         <p:spPr>
           <a:xfrm>
-            <a:off x="1257300" y="7734300"/>
-            <a:ext cx="6953250" cy="723900"/>
+            <a:off x="1257300" y="8039100"/>
+            <a:ext cx="6953250" cy="381000"/>
           </a:xfrm>
           <a:prstGeom prst="rect">
             <a:avLst/>
